--- a/public/fun/pack/pptx/reviewpro/보장점검양식프리미엄_16_본인점검_마린화이트.pptx
+++ b/public/fun/pack/pptx/reviewpro/보장점검양식프리미엄_16_본인점검_마린화이트.pptx
@@ -112,12 +112,12 @@
   <p:extLst>
     <p:ext uri="{521415D9-36F7-43E2-AB2F-B90AF26B5E84}">
       <p14:sectionLst xmlns:p14="http://schemas.microsoft.com/office/powerpoint/2010/main">
-        <p14:section name="시작" id="{BBC720B0-407F-4D32-857F-D4E15884FE3F}">
+        <p14:section name="시작" id="{1A921A7F-55A3-4F4D-87D7-9A4180DB3073}">
           <p14:sldIdLst>
             <p14:sldId id="256"/>
           </p14:sldIdLst>
         </p14:section>
-        <p14:section name="본문" id="{C2DAF866-016D-4703-8923-C421A5119630}">
+        <p14:section name="본문" id="{0FC3EB8D-AD0E-44D8-9B34-09BCF1A72CF3}">
           <p14:sldIdLst>
             <p14:sldId id="257"/>
             <p14:sldId id="258"/>
@@ -1523,7 +1523,7 @@
             </a:lvl1pPr>
           </a:lstStyle>
           <a:p>
-            <a:fld id="{608CDB66-BBAC-47A5-BA91-9A1B218A878B}" type="slidenum">
+            <a:fld id="{58342786-A64E-49D6-B23C-E26412C0F7A5}" type="slidenum">
               <a:rPr lang="en-US"/>
               <a:t>‹#›</a:t>
             </a:fld>
@@ -2196,7 +2196,7 @@
             </a:lvl1pPr>
           </a:lstStyle>
           <a:p>
-            <a:fld id="{72FC62C3-39E7-4FCD-97DA-CECF4B8940C4}" type="slidenum">
+            <a:fld id="{1A80C144-7BCA-4826-B46E-AE0B0A075FCE}" type="slidenum">
               <a:rPr lang="en-US"/>
               <a:t>‹#›</a:t>
             </a:fld>
@@ -2884,7 +2884,7 @@
             </a:lvl1pPr>
           </a:lstStyle>
           <a:p>
-            <a:fld id="{72462DD5-A1A9-4EB4-91CE-F296FC0768F2}" type="slidenum">
+            <a:fld id="{B7A5D9F6-B828-4C68-8331-83C5B0817678}" type="slidenum">
               <a:rPr lang="en-US"/>
               <a:t>‹#›</a:t>
             </a:fld>
@@ -3795,7 +3795,7 @@
           <a:p>
             <a:r>
               <a:rPr lang="ko-KR"/>
-              <a:t>본인 점검 · 0000. 00. 00</a:t>
+              <a:t>본인 점검 · 날짜 입력</a:t>
             </a:r>
           </a:p>
           <a:p>
@@ -3886,7 +3886,7 @@
           <a:bodyPr/>
           <a:lstStyle/>
           <a:p>
-            <a:fld id="{3BCFB2C3-A65A-4ED6-B252-1D4DB1A025E4}" type="slidenum">
+            <a:fld id="{B3A630A3-63F0-49C2-A5A2-6895F4279235}" type="slidenum">
               <a:rPr lang="en-US"/>
               <a:t>‹#›</a:t>
             </a:fld>
@@ -4402,7 +4402,7 @@
           <a:bodyPr/>
           <a:lstStyle/>
           <a:p>
-            <a:fld id="{0DCD214E-3A33-41DF-A7FE-B6D5BDBDFB22}" type="slidenum">
+            <a:fld id="{99A03639-87DA-4EF1-8991-AD797E841A23}" type="slidenum">
               <a:rPr lang="en-US"/>
               <a:t>‹#›</a:t>
             </a:fld>
@@ -5908,7 +5908,7 @@
           <a:bodyPr/>
           <a:lstStyle/>
           <a:p>
-            <a:fld id="{7DAF690E-E41C-4A7F-8D9C-EC9DACB10CC8}" type="slidenum">
+            <a:fld id="{5A912BEC-6255-41BF-B7F9-1ECD6C4CECD9}" type="slidenum">
               <a:rPr lang="en-US"/>
               <a:t>‹#›</a:t>
             </a:fld>
@@ -7458,7 +7458,7 @@
           <a:bodyPr/>
           <a:lstStyle/>
           <a:p>
-            <a:fld id="{37B58A28-623A-42B5-ABD9-8CF1ABCCE1CD}" type="slidenum">
+            <a:fld id="{D2F17CA6-47E4-4CAB-8CCF-ECC9CFD3236E}" type="slidenum">
               <a:rPr lang="en-US"/>
               <a:t>‹#›</a:t>
             </a:fld>
@@ -8329,7 +8329,7 @@
           <a:bodyPr/>
           <a:lstStyle/>
           <a:p>
-            <a:fld id="{FADAA721-5B6A-473F-B6D9-C04AE790C55A}" type="slidenum">
+            <a:fld id="{9FFA4829-2632-453D-9B75-AE1CCE333947}" type="slidenum">
               <a:rPr lang="en-US"/>
               <a:t>‹#›</a:t>
             </a:fld>
